--- a/docs/pptx/whole/jx-linsubhr-disc-death.pptx
+++ b/docs/pptx/whole/jx-linsubhr-disc-death.pptx
@@ -5072,7 +5072,7 @@
           <p:spPr>
             <a:xfrm>
               <a:off x="817517" y="1896563"/>
-              <a:ext cx="4749210" cy="82021"/>
+              <a:ext cx="5600608" cy="82021"/>
             </a:xfrm>
             <a:prstGeom prst="rect">
               <a:avLst/>
@@ -5104,7 +5104,7 @@
                   <a:latin typeface="Helvetica"/>
                   <a:cs typeface="Helvetica"/>
                 </a:rPr>
-                <a:t>HR per 1 mL/min: 0.96 (0.95-0.98)  |  per IQR (Δ = 23.3): 0.41 (0.28-0.59)  |  IQR: [-12.8, 10.5]</a:t>
+                <a:t>HR per 10 mL/min decline: 1.47 (1.25-1.73)  |  per IQR decline (Δ = 23.3): 2.45 (1.69-3.57)  |  IQR: [-12.8, 10.5]</a:t>
               </a:r>
             </a:p>
           </p:txBody>

--- a/docs/pptx/whole/jx-linsubhr-disc-death.pptx
+++ b/docs/pptx/whole/jx-linsubhr-disc-death.pptx
@@ -5072,7 +5072,7 @@
           <p:spPr>
             <a:xfrm>
               <a:off x="817517" y="1896563"/>
-              <a:ext cx="5600608" cy="82021"/>
+              <a:ext cx="6210513" cy="82021"/>
             </a:xfrm>
             <a:prstGeom prst="rect">
               <a:avLst/>
@@ -5104,7 +5104,7 @@
                   <a:latin typeface="Helvetica"/>
                   <a:cs typeface="Helvetica"/>
                 </a:rPr>
-                <a:t>HR per 10 mL/min decline: 1.47 (1.25-1.73)  |  per IQR decline (Δ = 23.3): 2.45 (1.69-3.57)  |  IQR: [-12.8, 10.5]</a:t>
+                <a:t>HR per 10 mL/min decline: 1.47 (1.25-1.73), p = &lt;0.001  |  per IQR decline (Δ = 23.3): 2.45 (1.69-3.57)  |  IQR: [-12.8, 10.5]</a:t>
               </a:r>
             </a:p>
           </p:txBody>

--- a/docs/pptx/whole/jx-linsubhr-disc-death.pptx
+++ b/docs/pptx/whole/jx-linsubhr-disc-death.pptx
@@ -5072,7 +5072,7 @@
           <p:spPr>
             <a:xfrm>
               <a:off x="817517" y="1896563"/>
-              <a:ext cx="6210513" cy="82021"/>
+              <a:ext cx="6874276" cy="82021"/>
             </a:xfrm>
             <a:prstGeom prst="rect">
               <a:avLst/>
@@ -5104,7 +5104,7 @@
                   <a:latin typeface="Helvetica"/>
                   <a:cs typeface="Helvetica"/>
                 </a:rPr>
-                <a:t>HR per 10 mL/min decline: 1.47 (1.25-1.73), p = &lt;0.001  |  per IQR decline (Δ = 23.3): 2.45 (1.69-3.57)  |  IQR: [-12.8, 10.5]</a:t>
+                <a:t>HR per 10 mL/min decline: 1.47 (1.25-1.73), p_Bonf = &lt;0.001 (n = 6)  |  per IQR decline (Δ = 23.3): 2.45 (1.69-3.57)  |  IQR: [-12.8, 10.5]</a:t>
               </a:r>
             </a:p>
           </p:txBody>
